--- a/slides_prog_concorrente _final.pptx
+++ b/slides_prog_concorrente _final.pptx
@@ -1759,7 +1759,39 @@
                   <a:srgbClr val="ADB8C5"/>
                 </a:solidFill>
               </a:rPr>
-              <a:t>   ·   ANÁLISE E DESENVOLVIMENTO DE SOFTWARE &amp; </a:t>
+              <a:t>   ·   </a:t>
+            </a:r>
+            <a:r>
+              <a:rPr lang="en-US" sz="1000" dirty="0" err="1">
+                <a:solidFill>
+                  <a:srgbClr val="ADB8C5"/>
+                </a:solidFill>
+              </a:rPr>
+              <a:t>Análise</a:t>
+            </a:r>
+            <a:r>
+              <a:rPr lang="en-US" sz="1000" dirty="0">
+                <a:solidFill>
+                  <a:srgbClr val="ADB8C5"/>
+                </a:solidFill>
+              </a:rPr>
+              <a:t> e </a:t>
+            </a:r>
+            <a:r>
+              <a:rPr lang="en-US" sz="1000" dirty="0" err="1">
+                <a:solidFill>
+                  <a:srgbClr val="ADB8C5"/>
+                </a:solidFill>
+              </a:rPr>
+              <a:t>Desenvolvimento</a:t>
+            </a:r>
+            <a:r>
+              <a:rPr lang="en-US" sz="1000" dirty="0">
+                <a:solidFill>
+                  <a:srgbClr val="ADB8C5"/>
+                </a:solidFill>
+              </a:rPr>
+              <a:t> de </a:t>
             </a:r>
             <a:r>
               <a:rPr lang="en-US" sz="1000" dirty="0" err="1">
@@ -1769,16 +1801,22 @@
               </a:rPr>
               <a:t>Sistemas</a:t>
             </a:r>
-            <a:endParaRPr lang="en-US" sz="1000" dirty="0">
-              <a:solidFill>
-                <a:srgbClr val="ADB8C5"/>
-              </a:solidFill>
-            </a:endParaRPr>
-          </a:p>
-          <a:p>
-            <a:pPr marL="0" indent="0" algn="l">
-              <a:buNone/>
-            </a:pPr>
+            <a:r>
+              <a:rPr lang="en-US" sz="1000" dirty="0">
+                <a:solidFill>
+                  <a:srgbClr val="ADB8C5"/>
+                </a:solidFill>
+              </a:rPr>
+              <a:t> &amp; </a:t>
+            </a:r>
+            <a:r>
+              <a:rPr lang="en-US" sz="1000" dirty="0" err="1">
+                <a:solidFill>
+                  <a:srgbClr val="ADB8C5"/>
+                </a:solidFill>
+              </a:rPr>
+              <a:t>Sistemas</a:t>
+            </a:r>
             <a:r>
               <a:rPr lang="en-US" sz="1000" dirty="0">
                 <a:solidFill>
